--- a/docs/architektur.pptx
+++ b/docs/architektur.pptx
@@ -10926,7 +10926,7 @@
                   <a:schemeClr val="tx2"/>
                 </a:solidFill>
               </a:rPr>
-              <a:t>BookingApi: DTO → Modell</a:t>
+              <a:t>BookingApi: DTOs unverändert</a:t>
             </a:r>
             <a:endParaRPr lang="en-US" sz="1000" dirty="0"/>
           </a:p>
@@ -11365,7 +11365,7 @@
                   <a:schemeClr val="tx2"/>
                 </a:solidFill>
               </a:rPr>
-              <a:t>Adapter austauschbar (openapi-tools, hey-api, nx-plugin-openapi). Ein Adapterwechsel ändert nur den Wrapper in data-access.</a:t>
+              <a:t>Adapter austauschbar (openapi-tools, hey-api, nx-plugin-openapi). Die DTOs gelten in allen Layern (keine Mapper): ein Adapterwechsel trifft jede Nutzung, der Compiler zeigt sie.</a:t>
             </a:r>
             <a:endParaRPr lang="en-US" sz="1200" dirty="0"/>
           </a:p>
@@ -16159,7 +16159,7 @@
                   <a:schemeClr val="tx2"/>
                 </a:solidFill>
               </a:rPr>
-              <a:t>Ein Slice importiert nur sich selbst und shared. Ein Feat nur sich selbst und die Libs seines Slice-Roots. Es gibt keine Ports.</a:t>
+              <a:t>Ein Slice (Vertical = geschlossenes Feature) importiert nur sich selbst und shared. Ein Feat nur sich selbst und die Libs seines Slice-Roots. Es gibt keine Ports.</a:t>
             </a:r>
             <a:endParaRPr lang="en-US" sz="1300" dirty="0"/>
           </a:p>
@@ -19607,7 +19607,7 @@
                   <a:schemeClr val="tx2"/>
                 </a:solidFill>
               </a:rPr>
-              <a:t>Modelle, reine Helfer</a:t>
+              <a:t>eigene Typen, Helfer</a:t>
             </a:r>
             <a:endParaRPr lang="en-US" sz="1100" dirty="0"/>
           </a:p>
@@ -28117,7 +28117,7 @@
                   <a:schemeClr val="tx2"/>
                 </a:solidFill>
               </a:rPr>
-              <a:t>DTO → Modell, Promise</a:t>
+              <a:t>DTOs unverändert, Promise</a:t>
             </a:r>
             <a:endParaRPr lang="en-US" sz="1100" dirty="0"/>
           </a:p>
